--- a/Part3_TargetSim/ref/산출물/Chapter3_TargetSim.pptx
+++ b/Part3_TargetSim/ref/산출물/Chapter3_TargetSim.pptx
@@ -858,7 +858,7 @@
           </a:p>
           <a:p>
             <a:r>
-              <a:t>두 번째 카드는 계산을 전부 사본에서 하고, 값이 정상일 때만 한 번에 반영한다는 내용입니다. 그리고 세 번째 카드는 알고 있지만 남겨 둔 한계인데, Pitch 가 90도 가까이 가면 Yaw 기동이 궤적을 바꾸지 못하는 짐벌락이 생깁니다. 이번 과제 조건에서는 Pitch 가 그 근처까지 가지 않아서 그대로 두었습니다.</a:t>
+              <a:t>두 번째 카드는 st_Next 를 따로 두는 이유입니다. 1번부터 4번까지는 모두 스텝을 시작할 때의 상태를 읽어야 해서, 새 값은 st_Next 에 모아 두었다가 마지막에 한 번에 옮깁니다. 그리고 세 번째 카드는 알고 있지만 남겨 둔 한계인데, Pitch 가 90도 가까이 가면 Yaw 기동이 궤적을 바꾸지 못하는 짐벌락이 생깁니다. 이번 과제 조건에서는 Pitch 가 그 근처까지 가지 않아서 그대로 두었습니다.</a:t>
             </a:r>
           </a:p>
         </p:txBody>
@@ -1108,7 +1108,7 @@
           </a:p>
           <a:p>
             <a:r>
-              <a:t>가운데는 운용 화면입니다. 왼쪽 위 표에서 표적을 추가하고 값을 바꿀 수 있고, 그 아래 표에서 기동을 넣습니다. 오른쪽에는 궤적과 고도가 그려지고, 아래 슬라이더로 원하는 시각의 결과를 다시 볼 수 있습니다.</a:t>
+              <a:t>가운데는 운용 화면의 구성입니다. 왼쪽 위 표에서 표적을 추가하고 값을 바꿀 수 있고, 그 아래 표에서 고른 표적의 기동을 넣습니다. 오른쪽 위에는 궤적과 고도가 그려지고, 그 아래 표에서 시각별 위도, 경도, 고도를 볼 수 있습니다.</a:t>
             </a:r>
           </a:p>
           <a:p>
@@ -1188,7 +1188,7 @@
           </a:p>
           <a:p>
             <a:r>
-              <a:t>왼쪽 아래는 알고 있지만 남겨 둔 한계입니다. 앞에서 말씀드린 짐벌락은 자세를 쿼터니언으로 다루면 없앨 수 있고, 힘을 계산하지 않고 속도를 바로 주는 방식이라 중력의 영향을 받는 탄도 표적에는 맞지 않습니다. 또 속력이 일정하게 유지되는 구조라서 가속이나 감속하는 기동은 아직 표현하지 못합니다. 세 가지 모두 이번 과제 범위에서는 문제가 되지 않았습니다.</a:t>
+              <a:t>왼쪽 아래는 알고 있지만 남겨 둔 한계입니다. 앞에서 말씀드린 짐벌락은 자세를 쿼터니언으로 다루면 없앨 수 있고, 힘을 계산하지 않고 속도를 바로 주는 방식이라 중력의 영향을 받는 탄도 표적에는 맞지 않습니다. 또 속력이 일정하게 유지되는 구조라서 가속이나 감속하는 기동은 아직 표현하지 못합니다. 세 가지 모두 이번 과제 범위에서는 문제가 되지 않았습니다. 그리고 입력값은 따로 검사하지 않기 때문에, 올바른 값을 넣는다는 전제로 동작합니다.</a:t>
             </a:r>
           </a:p>
           <a:p>
@@ -1513,12 +1513,12 @@
           </a:p>
           <a:p>
             <a:r>
-              <a:t>왼쪽 아래 상자가 DLL 구현으로, C 로 작성한 TargetSimCore 에서 실제 계산을 전부 합니다. 이 중에서 CoordinateTransform 과 matrixCalcLib 은 참고 소스 코드를 그대로 사용했고, 표적 상태를 갱신하는 TargetSim.c 를 이번 과제에서 새로 작성했습니다. 그 위의 UI 구현은 MFC 로 만든 화면으로, 시나리오 입력과 범위 검사, 궤적 그림, 결과 표를 맡고 있습니다.</a:t>
-            </a:r>
-          </a:p>
-          <a:p>
-            <a:r>
-              <a:t>둘 사이는 오른쪽에 있는 구조체 두 개로만 주고받는데, 설정을 담은 ST_SimConfig 를 넘기면 시각마다의 상태가 담긴 ST_SimSample 이 돌아오는 구조입니다. 맨 아래는 UI 가 DLL 함수를 부르는 순서로, 설정을 검사하고, 초기 상태를 만들고, 한 스텝씩 전진시킨 뒤, 그림에 필요한 좌표 변환을 부르게 됩니다.</a:t>
+              <a:t>왼쪽 아래 상자가 DLL 구현으로, C 로 작성한 TargetSimCore 에서 실제 계산을 전부 합니다. 이 중에서 CoordinateTransform 과 matrixCalcLib 은 참고 소스 코드를 그대로 사용했고, 표적 상태를 갱신하는 TargetSim.c 를 이번 과제에서 새로 작성했습니다. 그 위의 UI 구현은 MFC 로 만든 화면으로, 시나리오 입력과 궤적 그림, 결과 표를 맡고 있습니다.</a:t>
+            </a:r>
+          </a:p>
+          <a:p>
+            <a:r>
+              <a:t>둘 사이는 오른쪽에 있는 구조체 두 개로만 주고받는데, 설정을 담은 ST_SimConfig 를 넘기면 시각마다의 상태가 담긴 ST_SimSample 이 돌아오는 구조입니다. 맨 아래는 UI 가 DLL 함수를 부르는 순서로, 초기 상태를 만들고 한 스텝씩 전진시킨 뒤, 궤적을 그림 좌표로 바꾸고 격자에 쓸 위경도를 구하는 좌표 변환을 부르게 됩니다.</a:t>
             </a:r>
           </a:p>
           <a:p>
@@ -1683,7 +1683,7 @@
           </a:p>
           <a:p>
             <a:r>
-              <a:t>왼쪽처럼 기동 하나를 네 가지 값으로 정리했습니다. 어느 축으로, 얼마나 세게, 언제부터 언제까지 도는지이고, 세기는 G 값의 크기로, 방향은 G 값의 부호로 받습니다. 구간은 시작 시각은 포함하고 끝 시각은 포함하지 않게 잡아서 앞 기동의 끝과 다음 기동의 시작이 같아도 겹친 것으로 보지 않고, 실제로 겹치면 계산 전에 오류로 걸러냅니다.</a:t>
+              <a:t>왼쪽처럼 기동 하나를 네 가지 값으로 정리했습니다. 어느 축으로, 얼마나 세게, 언제부터 언제까지 도는지이고, 세기는 G 값의 크기로, 방향은 G 값의 부호로 받습니다. 구간은 시작 시각은 포함하고 끝 시각은 포함하지 않게 잡아서 앞 기동의 끝과 다음 기동의 시작이 같아도 겹친 것으로 보지 않고, 구간이 겹치면 목록에서 앞에 있는 기동이 적용됩니다.</a:t>
             </a:r>
           </a:p>
           <a:p>
@@ -8322,7 +8322,7 @@
                 <a:ea typeface="맑은 고딕"/>
                 <a:cs typeface="맑은 고딕"/>
               </a:rPr>
-              <a:t>계산이 깨져도 상태는 지킨다</a:t>
+              <a:t>st_Next 를 따로 두는 이유</a:t>
             </a:r>
             <a:endParaRPr lang="ko-KR" altLang="en-US" sz="1200" dirty="0"/>
           </a:p>
@@ -8371,7 +8371,7 @@
                 <a:ea typeface="맑은 고딕"/>
                 <a:cs typeface="맑은 고딕"/>
               </a:rPr>
-              <a:t>사본에서 전부 계산하고 값이 정상인지</a:t>
+              <a:t>①~④ 는 모두 스텝 시작 상태를 읽는다.</a:t>
             </a:r>
             <a:endParaRPr lang="ko-KR" altLang="en-US" sz="940" dirty="0"/>
           </a:p>
@@ -8397,7 +8397,7 @@
                 <a:ea typeface="맑은 고딕"/>
                 <a:cs typeface="맑은 고딕"/>
               </a:rPr>
-              <a:t>확인한 뒤, 모두 성공했을 때만 한 번에</a:t>
+              <a:t>새 값은 st_Next 에 모았다가 마지막에</a:t>
             </a:r>
             <a:endParaRPr lang="ko-KR" altLang="en-US" sz="940" dirty="0"/>
           </a:p>
@@ -8423,7 +8423,7 @@
                 <a:ea typeface="맑은 고딕"/>
                 <a:cs typeface="맑은 고딕"/>
               </a:rPr>
-              <a:t>반영한다.</a:t>
+              <a:t>한 번에 옮겨, 계산 중에 섞이지 않는다.</a:t>
             </a:r>
             <a:endParaRPr lang="ko-KR" altLang="en-US" sz="940" dirty="0"/>
           </a:p>
@@ -12186,7 +12186,7 @@
                 <a:ea typeface="맑은 고딕"/>
                 <a:cs typeface="맑은 고딕"/>
               </a:rPr>
-              <a:t>운용 화면 (TargetSimUI)</a:t>
+              <a:t>운용 화면 구성 (TargetSimUI)</a:t>
             </a:r>
             <a:endParaRPr lang="ko-KR" altLang="en-US" sz="1100" dirty="0"/>
           </a:p>
@@ -12289,7 +12289,7 @@
                 <a:ea typeface="맑은 고딕"/>
                 <a:cs typeface="맑은 고딕"/>
               </a:rPr>
-              <a:t>기동 시연 프리셋을 불러와 표적 2(대공)를 고른 화면입니다.</a:t>
+              <a:t>기동 시연 프리셋을 불러와 표적 2(대공)를 고른 상태입니다.</a:t>
             </a:r>
             <a:endParaRPr lang="ko-KR" altLang="en-US" sz="900" dirty="0"/>
           </a:p>
@@ -12315,7 +12315,7 @@
                 <a:ea typeface="맑은 고딕"/>
                 <a:cs typeface="맑은 고딕"/>
               </a:rPr>
-              <a:t>아래 표에 기동 6개가 보이고, 그림은 t = 30 s 위치를 표시합니다.</a:t>
+              <a:t>왼쪽은 입력 표 두 개, 오른쪽은 궤적 · 고도 그림과 시각별 LLA 표입니다.</a:t>
             </a:r>
             <a:endParaRPr lang="ko-KR" altLang="en-US" sz="900" dirty="0"/>
           </a:p>
@@ -12574,7 +12574,7 @@
                 <a:ea typeface="맑은 고딕"/>
                 <a:cs typeface="맑은 고딕"/>
               </a:rPr>
-              <a:t>그림에서 끌어서 배치</a:t>
+              <a:t>표적 10개, 기동 30개까지</a:t>
             </a:r>
             <a:endParaRPr lang="ko-KR" altLang="en-US" sz="1050" dirty="0"/>
           </a:p>
@@ -12623,7 +12623,7 @@
                 <a:ea typeface="맑은 고딕"/>
                 <a:cs typeface="맑은 고딕"/>
               </a:rPr>
-              <a:t>시작점과 기수 손잡이를 끌면</a:t>
+              <a:t>추가 단추로 한 줄씩 늘리고,</a:t>
             </a:r>
             <a:endParaRPr lang="ko-KR" altLang="en-US" sz="950" dirty="0"/>
           </a:p>
@@ -12649,7 +12649,7 @@
                 <a:ea typeface="맑은 고딕"/>
                 <a:cs typeface="맑은 고딕"/>
               </a:rPr>
-              <a:t>위도, 경도, Yaw 가 표에</a:t>
+              <a:t>고른 줄은 바로 지울 수 있다.</a:t>
             </a:r>
             <a:endParaRPr lang="ko-KR" altLang="en-US" sz="950" dirty="0"/>
           </a:p>
@@ -12675,7 +12675,7 @@
                 <a:ea typeface="맑은 고딕"/>
                 <a:cs typeface="맑은 고딕"/>
               </a:rPr>
-              <a:t>반영된다.</a:t>
+              <a:t>기동 표는 고른 표적을 따른다.</a:t>
             </a:r>
             <a:endParaRPr lang="ko-KR" altLang="en-US" sz="950" dirty="0"/>
           </a:p>
@@ -12829,7 +12829,7 @@
                 <a:ea typeface="맑은 고딕"/>
                 <a:cs typeface="맑은 고딕"/>
               </a:rPr>
-              <a:t>슬라이더로 시각을 옮기고,</a:t>
+              <a:t>궤적과 고도를 그림으로 보고,</a:t>
             </a:r>
             <a:endParaRPr lang="ko-KR" altLang="en-US" sz="950" dirty="0"/>
           </a:p>
@@ -13403,7 +13403,7 @@
                 </a:solidFill>
                 <a:latin typeface="맑은 고딕"/>
               </a:rPr>
-              <a:t>고정 배열로 상한, 범위 밖은 오류 코드</a:t>
+              <a:t>고정 배열로 상한, 추가 단추에서 개수 제한</a:t>
             </a:r>
           </a:p>
         </p:txBody>
@@ -13442,7 +13442,7 @@
                 </a:solidFill>
                 <a:latin typeface="Consolas"/>
               </a:rPr>
-              <a:t>범위 검사</a:t>
+              <a:t>통과</a:t>
             </a:r>
           </a:p>
         </p:txBody>
@@ -13681,7 +13681,7 @@
                 </a:solidFill>
                 <a:latin typeface="맑은 고딕"/>
               </a:rPr>
-              <a:t>ST_TargetManeuver 4 필드, 구간 겹침 검사</a:t>
+              <a:t>ST_TargetManeuver 4 필드, 구간 [시작, 종료)</a:t>
             </a:r>
           </a:p>
         </p:txBody>
@@ -19228,7 +19228,7 @@
                 <a:ea typeface="맑은 고딕"/>
                 <a:cs typeface="맑은 고딕"/>
               </a:rPr>
-              <a:t>화면 배치, 자동 실행, 재생</a:t>
+              <a:t>화면 배치, 자동 실행, CSV 저장</a:t>
             </a:r>
             <a:endParaRPr lang="ko-KR" altLang="en-US" sz="1000" dirty="0"/>
           </a:p>
@@ -19326,7 +19326,7 @@
                 <a:ea typeface="맑은 고딕"/>
                 <a:cs typeface="맑은 고딕"/>
               </a:rPr>
-              <a:t>입력 보관, 범위 검사, 파일 입출력</a:t>
+              <a:t>입력 보관, 프리셋, 설정 생성</a:t>
             </a:r>
             <a:endParaRPr lang="ko-KR" altLang="en-US" sz="1000" dirty="0"/>
           </a:p>
@@ -20873,7 +20873,7 @@
                 <a:ea typeface="맑은 고딕"/>
                 <a:cs typeface="맑은 고딕"/>
               </a:rPr>
-              <a:t>f_Tgt_ValidateConfig</a:t>
+              <a:t>f_Tgt_InitSim</a:t>
             </a:r>
             <a:endParaRPr lang="ko-KR" altLang="en-US" sz="950" dirty="0"/>
           </a:p>
@@ -20922,7 +20922,7 @@
                 <a:ea typeface="맑은 고딕"/>
                 <a:cs typeface="맑은 고딕"/>
               </a:rPr>
-              <a:t>설정 전체 검사</a:t>
+              <a:t>초기 상태 (표본 0) 생성</a:t>
             </a:r>
             <a:endParaRPr lang="ko-KR" altLang="en-US" sz="950" dirty="0"/>
           </a:p>
@@ -21104,7 +21104,7 @@
                 <a:ea typeface="맑은 고딕"/>
                 <a:cs typeface="맑은 고딕"/>
               </a:rPr>
-              <a:t>f_Tgt_InitSim</a:t>
+              <a:t>f_Tgt_StepSim</a:t>
             </a:r>
             <a:endParaRPr lang="ko-KR" altLang="en-US" sz="950" dirty="0"/>
           </a:p>
@@ -21153,7 +21153,7 @@
                 <a:ea typeface="맑은 고딕"/>
                 <a:cs typeface="맑은 고딕"/>
               </a:rPr>
-              <a:t>초기 상태 (표본 0) 생성</a:t>
+              <a:t>한 스텝 전진, 반복 호출</a:t>
             </a:r>
             <a:endParaRPr lang="ko-KR" altLang="en-US" sz="950" dirty="0"/>
           </a:p>
@@ -21335,7 +21335,7 @@
                 <a:ea typeface="맑은 고딕"/>
                 <a:cs typeface="맑은 고딕"/>
               </a:rPr>
-              <a:t>f_Tgt_StepSim</a:t>
+              <a:t>f_Tgt_EcefToNed</a:t>
             </a:r>
             <a:endParaRPr lang="ko-KR" altLang="en-US" sz="950" dirty="0"/>
           </a:p>
@@ -21384,7 +21384,7 @@
                 <a:ea typeface="맑은 고딕"/>
                 <a:cs typeface="맑은 고딕"/>
               </a:rPr>
-              <a:t>한 스텝 전진, 반복 호출</a:t>
+              <a:t>궤적을 동 · 북 좌표로 변환</a:t>
             </a:r>
             <a:endParaRPr lang="ko-KR" altLang="en-US" sz="950" dirty="0"/>
           </a:p>
@@ -21566,7 +21566,7 @@
                 <a:ea typeface="맑은 고딕"/>
                 <a:cs typeface="맑은 고딕"/>
               </a:rPr>
-              <a:t>f_Tgt_EcefToNed</a:t>
+              <a:t>f_Tgt_NedToLla</a:t>
             </a:r>
             <a:r>
               <a:rPr lang="ko-KR" altLang="en-US" sz="950" b="1" i="0" dirty="0">
@@ -21626,7 +21626,7 @@
                 <a:ea typeface="맑은 고딕"/>
                 <a:cs typeface="맑은 고딕"/>
               </a:rPr>
-              <a:t>그림용 좌표 변환</a:t>
+              <a:t>격자 눈금용 위경도 계산</a:t>
             </a:r>
             <a:endParaRPr lang="ko-KR" altLang="en-US" sz="950" dirty="0"/>
           </a:p>
@@ -26279,7 +26279,7 @@
                 <a:ea typeface="맑은 고딕"/>
                 <a:cs typeface="맑은 고딕"/>
               </a:rPr>
-              <a:t>구간이 서로 겹치면 계산 전에 오류로 걸러낸다.</a:t>
+              <a:t>구간이 겹치면 목록에서 앞에 있는 기동을 따른다.</a:t>
             </a:r>
             <a:endParaRPr lang="ko-KR" altLang="en-US" sz="1000" dirty="0"/>
           </a:p>
@@ -30129,7 +30129,7 @@
                 <a:ea typeface="맑은 고딕"/>
                 <a:cs typeface="맑은 고딕"/>
               </a:rPr>
-              <a:t>실제로 겹치면 계산 전에 거부한다.</a:t>
+              <a:t>겹치면 목록에서 앞선 기동을 따른다.</a:t>
             </a:r>
             <a:endParaRPr lang="ko-KR" altLang="en-US" sz="980" dirty="0"/>
           </a:p>

--- a/Part3_TargetSim/ref/산출물/Chapter3_TargetSim.pptx
+++ b/Part3_TargetSim/ref/산출물/Chapter3_TargetSim.pptx
@@ -684,12 +684,12 @@
           </a:p>
           <a:p>
             <a:r>
-              <a:t>함수 머리를 보면 자세와 위치, 속력을 받아서 그 순간의 ECEF 속도 x, y, z 를 돌려줍니다. 플랫폼 상태는 플랫폼 기준 비교일 때만 넘어오고, 평소에는 NULL 입니다. 67행에서 기수 쪽으로 V 인 속도를 자세만큼 돌려 북, 동, 아래 세 성분으로 나눕니다. Yaw 180도로 200 m/s 면 북쪽 성분이 마이너스 200 입니다.</a:t>
-            </a:r>
-          </a:p>
-          <a:p>
-            <a:r>
-              <a:t>72행에서 이것을 표적이 있는 위도, 경도만큼 한 번 더 돌려 ECEF 로 바꿉니다. 위치가 아니라 속도라서 돌리기만 하면 되므로, 기준점 자리에는 0 을 넣습니다.</a:t>
+              <a:t>함수 머리를 보면 자세와 위치, 속력을 받아서 그 순간의 ECEF 속도 x, y, z 를 돌려줍니다. 플랫폼 상태는 플랫폼 기준 비교일 때만 넘어오고, 평소에는 NULL 입니다. 59행에서 기수 쪽으로 V 인 속도를 자세만큼 돌려 북, 동, 아래 세 성분으로 나눕니다. Yaw 180도로 200 m/s 면 북쪽 성분이 마이너스 200 입니다.</a:t>
+            </a:r>
+          </a:p>
+          <a:p>
+            <a:r>
+              <a:t>64행에서 이것을 표적이 있는 위도, 경도만큼 한 번 더 돌려 ECEF 로 바꿉니다. 위치가 아니라 속도라서 돌리기만 하면 되므로, 기준점 자리에는 0 을 넣습니다.</a:t>
             </a:r>
           </a:p>
           <a:p>
@@ -844,7 +844,7 @@
           <a:lstStyle/>
           <a:p>
             <a:r>
-              <a:t>중점법을 구현한 f_Tgt_Propagate 입니다. 길어서 두 쪽으로 나눴습니다.</a:t>
+              <a:t>중점법을 구현한 f_Tgt_Propagate 입니다. 길어서 두 쪽으로 나눴습니다. 함수 머리의 st_Trace 는 계산 로그를 켰을 때만 넘어오는 기록 칸입니다.</a:t>
             </a:r>
           </a:p>
           <a:p>
@@ -1089,7 +1089,7 @@
           </a:p>
           <a:p>
             <a:r>
-              <a:t>표적 10개, 기동 30개는 고정 배열로 담았고, 위치와 속력, 기동은 구조체로 받습니다. 상태는 ECEF 에서 갱신하고, 속도 변환은 동체에서 NED, ECEF 로 두 번 회전해 구현했습니다. 좌표변환은 참고 소스 함수를 그대로 썼고, 결과는 표와 CSV, 그림으로 볼 수 있습니다.</a:t>
+              <a:t>표적 10개, 기동 30개는 고정 배열로 담았고, 위치와 속력, 기동은 구조체로 받습니다. 상태는 ECEF 에서 갱신하고, 속도 변환은 동체에서 NED, ECEF 로 두 번 회전해 구현했습니다. 좌표변환은 참고 소스 함수를 그대로 썼고, 결과는 표와 CSV, 그림으로, 계산 과정은 계산 로그 콘솔로 볼 수 있습니다.</a:t>
             </a:r>
           </a:p>
         </p:txBody>
@@ -1234,7 +1234,7 @@
           </a:p>
           <a:p>
             <a:r>
-              <a:t>아래는 시뮬레이션 전체 설정입니다. 60초를 0.1초 간격으로 계산하고, 플랫폼 하나와 표적 최대 10개가 들어갑니다. noMidPoint 와 usePlatform 은 계산 방식을 비교할 때만 1 로 두는 값이고, 평소에는 0 입니다. 아래 띠처럼 UI 는 입력 표를 읽어 이 설정 한 묶음을 채운 뒤 DLL 에 넘깁니다.</a:t>
+              <a:t>아래는 시뮬레이션 전체 설정입니다. 60초를 0.1초 간격으로 계산하고, 플랫폼 하나와 표적 최대 10개가 들어갑니다. noMidPoint 와 usePlatform 은 계산 방식을 비교할 때만 1 로 두는 값이고, 평소에는 0 입니다. 맨 아래 pf_Trace 는 계산 로그를 켤 때만 넣는 함수로, DLL 이 계산 중간값을 이 함수로 UI 에 넘겨줍니다. 평소에는 NULL 입니다. 아래 띠처럼 UI 는 입력 표를 읽어 이 설정 한 묶음을 채운 뒤 DLL 에 넘깁니다.</a:t>
             </a:r>
           </a:p>
         </p:txBody>
@@ -1459,17 +1459,17 @@
           <a:lstStyle/>
           <a:p>
             <a:r>
-              <a:t>먼저 초기화 함수 f_Tgt_InitSim 입니다. TargetSim.c 의 156행부터 181행까지이고, 표시한 블록을 위에서부터 차례로 보겠습니다.</a:t>
-            </a:r>
-          </a:p>
-          <a:p>
-            <a:r>
-              <a:t>163행에서 UI 가 준 설정을 st_Sim 안에 통째로 복사해 둡니다. 한 스텝 함수는 st_Sim 만 받기 때문에, 이후에는 이 복사본을 읽습니다. 다음 스텝 수는 60초를 0.1초씩 나눈 600번이고, 0초 결과까지 합치면 결과는 601개입니다. 나눗셈에 0.5를 더하는 건 반올림입니다. 103.6초를 0.1초로 나누면 컴퓨터에서는 1035.999… 로 조금 모자라게 나와서, 그냥 자르면 한 번이 빠지기 때문입니다.</a:t>
-            </a:r>
-          </a:p>
-          <a:p>
-            <a:r>
-              <a:t>이어서 결과를 0초로 맞춥니다. 시각과 스텝 번호를 0 으로 두고 표적 수를 넣습니다. st_Sample 에는 늘 가장 최근 결과가 들어 있습니다. 마지막으로 플랫폼과 표적마다 0초의 위치와 속도를 만듭니다. 입력한 위도, 경도, 고도는 ECEF 위치로 바꾸고, 속력과 자세로 ECEF 속도를 구합니다.</a:t>
+              <a:t>먼저 초기화 함수 f_Tgt_InitSim 입니다. TargetSim.c 의 207행부터 234행까지이고, 표시한 블록을 위에서부터 차례로 보겠습니다.</a:t>
+            </a:r>
+          </a:p>
+          <a:p>
+            <a:r>
+              <a:t>214행에서 UI 가 준 설정을 st_Sim 안에 통째로 복사해 둡니다. 한 스텝 함수는 st_Sim 만 받기 때문에, 이후에는 이 복사본을 읽습니다. 다음 스텝 수는 60초를 0.1초씩 나눈 600번이고, 0초 결과까지 합치면 결과는 601개입니다. 나눗셈에 0.5를 더하는 건 반올림입니다. 103.6초를 0.1초로 나누면 컴퓨터에서는 1035.999… 로 조금 모자라게 나와서, 그냥 자르면 한 번이 빠지기 때문입니다.</a:t>
+            </a:r>
+          </a:p>
+          <a:p>
+            <a:r>
+              <a:t>이어서 결과를 0초로 맞춥니다. 시각과 스텝 번호를 0 으로 두고 표적 수를 넣습니다. st_Sample 에는 늘 가장 최근 결과가 들어 있습니다. 마지막으로 플랫폼과 표적마다 0초의 위치와 속도를 만듭니다. 입력한 위도, 경도, 고도는 ECEF 위치로 바꾸고, 속력과 자세로 ECEF 속도를 구합니다. f_Tgt_InitState 바로 아래 f_Tgt_SendInitTrace 는 계산 로그를 켰을 때만 이 0초 값을 UI 로 넘기는 줄입니다.</a:t>
             </a:r>
           </a:p>
         </p:txBody>
@@ -1539,7 +1539,7 @@
           <a:lstStyle/>
           <a:p>
             <a:r>
-              <a:t>한 스텝을 진행하는 f_Tgt_StepSim 입니다. 183행부터 213행까지입니다.</a:t>
+              <a:t>한 스텝을 진행하는 f_Tgt_StepSim 입니다. 236행부터 270행까지입니다.</a:t>
             </a:r>
           </a:p>
           <a:p>
@@ -1549,7 +1549,7 @@
           </a:p>
           <a:p>
             <a:r>
-              <a:t>다음은 플랫폼을 0.1초 옮깁니다. 기동이 없으니 세 축 모두 0 인 각속도를 넘기고, 과제의 플랫폼은 속력이 0 이라 제자리에 있습니다. 그 아래는 표적 수만큼 반복하면서 206행에서 지금 걸린 기동의 각속도를 구하고, 207행에서 그 각속도로 표적을 0.1초 옮깁니다.</a:t>
+              <a:t>다음은 플랫폼을 0.1초 옮깁니다. 기동이 없으니 세 축 모두 0 인 각속도를 넘기고, 과제의 플랫폼은 속력이 0 이라 제자리에 있습니다. 그 아래는 표적 수만큼 반복하면서 262행에서 지금 걸린 기동의 각속도를 구하고, 263행에서 그 각속도로 표적을 0.1초 옮깁니다. 옮길 때마다 바로 아래 f_Tgt_SendTrace 가 계산 로그용 중간값을 UI 로 넘기는데, 로그를 끄면 st_Trace 가 NULL 이라 아무 일도 하지 않습니다.</a:t>
             </a:r>
           </a:p>
           <a:p>
@@ -1624,7 +1624,7 @@
           <a:lstStyle/>
           <a:p>
             <a:r>
-              <a:t>지금 시각의 각속도를 구하는 f_Tgt_GetAttRate 입니다. 함수가 길어서 두 쪽으로 나눴고, 이 쪽은 11행부터 28행까지입니다.</a:t>
+              <a:t>지금 시각의 각속도를 구하는 f_Tgt_GetAttRate 입니다. 함수가 길어서 두 쪽으로 나눴고, 이 쪽은 3행부터 20행까지입니다.</a:t>
             </a:r>
           </a:p>
           <a:p>
@@ -1704,7 +1704,7 @@
           <a:lstStyle/>
           <a:p>
             <a:r>
-              <a:t>이어서 30행부터입니다. 찾은 기동의 G 값을 1초에 도는 각도로 바꿉니다. omega 는 G 값에 9.8 을 곱하고 속력으로 나눈 값입니다. 대공 표적이 8G, 200 m/s 면 약 0.39 rad/s, 초당 약 22.5도입니다. 같은 G 라도 빠른 표적일수록 천천히 돕니다.</a:t>
+              <a:t>이어서 22행부터입니다. 찾은 기동의 G 값을 1초에 도는 각도로 바꿉니다. omega 는 G 값에 9.8 을 곱하고 속력으로 나눈 값입니다. 대공 표적이 8G, 200 m/s 면 약 0.39 rad/s, 초당 약 22.5도입니다. 같은 G 라도 빠른 표적일수록 천천히 돕니다.</a:t>
             </a:r>
           </a:p>
           <a:p>
@@ -1794,7 +1794,7 @@
           </a:p>
           <a:p>
             <a:r>
-              <a:t>그 아래에서는 옮긴 위치에 맞게 새 위도, 경도, 고도와 새 시각, 그리고 0.1초 뒤 자세로 구한 새 속도를 채웁니다. 마지막 153행에서 다 만든 st_NextState 로 지금 상태를 한 번에 덮어씁니다. 중간에 바꾸면 뒤 계산이 바뀐 값을 읽기 때문입니다. 아래 띠가 두 쪽에 걸친 이 함수 한 번의 순서입니다.</a:t>
+              <a:t>그 아래에서는 옮긴 위치에 맞게 새 위도, 경도, 고도와 새 시각, 그리고 0.1초 뒤 자세로 구한 새 속도를 채웁니다. 바로 다음 f_Tgt_KeepTrace 는 계산 로그를 켰을 때만 이번 스텝의 중간값을 st_Trace 에 남기는 줄이라 결과에는 영향이 없습니다. 마지막 204행에서 다 만든 st_NextState 로 지금 상태를 한 번에 덮어씁니다. 중간에 바꾸면 뒤 계산이 바뀐 값을 읽기 때문입니다. 아래 띠가 두 쪽에 걸친 이 함수 한 번의 순서입니다.</a:t>
             </a:r>
           </a:p>
         </p:txBody>
@@ -1874,6 +1874,11 @@
           </a:p>
           <a:p>
             <a:r>
+              <a:t>1번 오른쪽 끝의 계산 로그를 켜면 콘솔 창이 열리고, 결과 표에서 보고 있는 객체의 계산 과정이 적힙니다. 입력값을 라디안과 ECEF 로 바꾸는 0초 상태부터, 첫 스텝과 기동이 바뀌는 스텝은 앞에서 본 순서대로 중간값을 모두 적고, 나머지는 1초마다 한 줄씩 적습니다. 값을 고치면 로그도 다시 씁니다.</a:t>
+            </a:r>
+          </a:p>
+          <a:p>
+            <a:r>
               <a:t>오른쪽 4번은 궤적과 고도, 속력 그림이고, 5번은 시각별 위경도 표입니다. 표 위에서 전체, 플랫폼, 표적 하나를 골라 볼 수 있고, 지금은 표적 2 만 보고 있습니다. 옆의 비중점법 비교나 플랫폼 기준 비교를 켜면 위도, 경도, 고도마다 그 계산 값이 바로 옆에 나옵니다. 플랫폼 기준 비교는 4번 그림에도 같은 색 점선으로 겹쳐 그려서, 고도가 내려가는 것을 바로 볼 수 있습니다. CSV 는 보기, 비교와 관계없이 기본 결과 전체를 저장합니다.</a:t>
             </a:r>
           </a:p>
@@ -2409,7 +2414,7 @@
           </a:p>
           <a:p>
             <a:r>
-              <a:t>둘은 설정 구조체 ST_SimConfig 와 결과 구조체 ST_SimSample 로만 주고받습니다.</a:t>
+              <a:t>둘은 설정 구조체 ST_SimConfig 와 결과 구조체 ST_SimSample 로 주고받고, UI 의 계산 로그를 켰을 때만 계산 중간값 ST_StepTrace 를 더 받습니다.</a:t>
             </a:r>
           </a:p>
         </p:txBody>
@@ -5782,7 +5787,7 @@
       </p:sp>
       <p:pic>
         <p:nvPicPr>
-          <p:cNvPr id="7" name="Code Capture" descr="TargetSim.c 59-85"/>
+          <p:cNvPr id="7" name="Code Capture" descr="TargetSim.c 51-77"/>
           <p:cNvPicPr>
             <a:picLocks noChangeAspect="1"/>
           </p:cNvPicPr>
@@ -6275,7 +6280,7 @@
                 <a:ea typeface="맑은 고딕"/>
                 <a:cs typeface="맑은 고딕"/>
               </a:rPr>
-              <a:t>TargetSimCore/src/TargetSim.c  59 ~ 85행</a:t>
+              <a:t>TargetSimCore/src/TargetSim.c  51 ~ 77행</a:t>
             </a:r>
             <a:endParaRPr lang="ko-KR" altLang="en-US" sz="1000" dirty="0"/>
           </a:p>
@@ -7777,7 +7782,7 @@
       </p:sp>
       <p:pic>
         <p:nvPicPr>
-          <p:cNvPr id="7" name="Code Capture" descr="TargetSim.c 100-129"/>
+          <p:cNvPr id="7" name="Code Capture" descr="TargetSim.c 147-176"/>
           <p:cNvPicPr>
             <a:picLocks noChangeAspect="1"/>
           </p:cNvPicPr>
@@ -7792,7 +7797,7 @@
         <p:spPr>
           <a:xfrm>
             <a:off x="640080" y="1792224"/>
-            <a:ext cx="6714172" cy="4334764"/>
+            <a:ext cx="6714172" cy="3966718"/>
           </a:xfrm>
           <a:prstGeom prst="rect">
             <a:avLst/>
@@ -7812,12 +7817,12 @@
         </p:nvSpPr>
         <p:spPr>
           <a:xfrm>
-            <a:off x="968692" y="3592576"/>
-            <a:ext cx="6334760" cy="868680"/>
+            <a:off x="968692" y="3437128"/>
+            <a:ext cx="6334760" cy="800100"/>
           </a:xfrm>
           <a:prstGeom prst="roundRect">
             <a:avLst>
-              <a:gd name="adj" fmla="val 4386"/>
+              <a:gd name="adj" fmla="val 4762"/>
             </a:avLst>
           </a:prstGeom>
           <a:solidFill>
@@ -7848,12 +7853,12 @@
         </p:nvSpPr>
         <p:spPr>
           <a:xfrm>
-            <a:off x="968692" y="4534916"/>
-            <a:ext cx="6334760" cy="599440"/>
+            <a:off x="968692" y="4299458"/>
+            <a:ext cx="6334760" cy="553720"/>
           </a:xfrm>
           <a:prstGeom prst="roundRect">
             <a:avLst>
-              <a:gd name="adj" fmla="val 6356"/>
+              <a:gd name="adj" fmla="val 6881"/>
             </a:avLst>
           </a:prstGeom>
           <a:solidFill>
@@ -7884,12 +7889,12 @@
         </p:nvSpPr>
         <p:spPr>
           <a:xfrm>
-            <a:off x="968692" y="5208016"/>
-            <a:ext cx="6334760" cy="868680"/>
+            <a:off x="968692" y="4915408"/>
+            <a:ext cx="6334760" cy="800100"/>
           </a:xfrm>
           <a:prstGeom prst="roundRect">
             <a:avLst>
-              <a:gd name="adj" fmla="val 4386"/>
+              <a:gd name="adj" fmla="val 4762"/>
             </a:avLst>
           </a:prstGeom>
           <a:solidFill>
@@ -7920,7 +7925,7 @@
         </p:nvCxnSpPr>
         <p:spPr>
           <a:xfrm>
-            <a:off x="7303452" y="4026916"/>
+            <a:off x="7303452" y="3837178"/>
             <a:ext cx="330200" cy="0"/>
           </a:xfrm>
           <a:prstGeom prst="line">
@@ -7942,7 +7947,7 @@
         </p:nvSpPr>
         <p:spPr>
           <a:xfrm>
-            <a:off x="7633652" y="3887216"/>
+            <a:off x="7633652" y="3697478"/>
             <a:ext cx="1406947" cy="279400"/>
           </a:xfrm>
           <a:prstGeom prst="roundRect">
@@ -7976,7 +7981,7 @@
         </p:nvSpPr>
         <p:spPr>
           <a:xfrm>
-            <a:off x="7633652" y="3887216"/>
+            <a:off x="7633652" y="3697478"/>
             <a:ext cx="1406947" cy="279400"/>
           </a:xfrm>
           <a:prstGeom prst="rect">
@@ -8025,7 +8030,7 @@
         </p:nvCxnSpPr>
         <p:spPr>
           <a:xfrm>
-            <a:off x="7303452" y="4834636"/>
+            <a:off x="7303452" y="4576318"/>
             <a:ext cx="330200" cy="0"/>
           </a:xfrm>
           <a:prstGeom prst="line">
@@ -8047,7 +8052,7 @@
         </p:nvSpPr>
         <p:spPr>
           <a:xfrm>
-            <a:off x="7633652" y="4694936"/>
+            <a:off x="7633652" y="4436618"/>
             <a:ext cx="1306363" cy="279400"/>
           </a:xfrm>
           <a:prstGeom prst="roundRect">
@@ -8081,7 +8086,7 @@
         </p:nvSpPr>
         <p:spPr>
           <a:xfrm>
-            <a:off x="7633652" y="4694936"/>
+            <a:off x="7633652" y="4436618"/>
             <a:ext cx="1306363" cy="279400"/>
           </a:xfrm>
           <a:prstGeom prst="rect">
@@ -8130,7 +8135,7 @@
         </p:nvCxnSpPr>
         <p:spPr>
           <a:xfrm>
-            <a:off x="7303452" y="5642356"/>
+            <a:off x="7303452" y="5315458"/>
             <a:ext cx="330200" cy="0"/>
           </a:xfrm>
           <a:prstGeom prst="line">
@@ -8152,7 +8157,7 @@
         </p:nvSpPr>
         <p:spPr>
           <a:xfrm>
-            <a:off x="7633652" y="5502656"/>
+            <a:off x="7633652" y="5175758"/>
             <a:ext cx="1406947" cy="279400"/>
           </a:xfrm>
           <a:prstGeom prst="roundRect">
@@ -8186,7 +8191,7 @@
         </p:nvSpPr>
         <p:spPr>
           <a:xfrm>
-            <a:off x="7633652" y="5502656"/>
+            <a:off x="7633652" y="5175758"/>
             <a:ext cx="1406947" cy="279400"/>
           </a:xfrm>
           <a:prstGeom prst="rect">
@@ -8270,7 +8275,7 @@
                 <a:ea typeface="맑은 고딕"/>
                 <a:cs typeface="맑은 고딕"/>
               </a:rPr>
-              <a:t>TargetSimCore/src/TargetSim.c  100 ~ 129행</a:t>
+              <a:t>TargetSimCore/src/TargetSim.c  147 ~ 176행</a:t>
             </a:r>
             <a:endParaRPr lang="ko-KR" altLang="en-US" sz="1000" dirty="0"/>
           </a:p>
@@ -16059,7 +16064,7 @@
       </p:sp>
       <p:pic>
         <p:nvPicPr>
-          <p:cNvPr id="7" name="Code Capture" descr="TargetSim.h 54-72"/>
+          <p:cNvPr id="7" name="Code Capture" descr="TargetSim.h 58-78"/>
           <p:cNvPicPr>
             <a:picLocks noChangeAspect="1"/>
           </p:cNvPicPr>
@@ -16074,7 +16079,7 @@
         <p:spPr>
           <a:xfrm>
             <a:off x="640080" y="1792224"/>
-            <a:ext cx="6714172" cy="2821940"/>
+            <a:ext cx="6714172" cy="3101340"/>
           </a:xfrm>
           <a:prstGeom prst="rect">
             <a:avLst/>
@@ -16131,11 +16136,11 @@
         <p:spPr>
           <a:xfrm>
             <a:off x="968692" y="2963164"/>
-            <a:ext cx="6334760" cy="1597660"/>
+            <a:ext cx="6334760" cy="1877060"/>
           </a:xfrm>
           <a:prstGeom prst="roundRect">
             <a:avLst>
-              <a:gd name="adj" fmla="val 2385"/>
+              <a:gd name="adj" fmla="val 2030"/>
             </a:avLst>
           </a:prstGeom>
           <a:solidFill>
@@ -16271,7 +16276,7 @@
         </p:nvCxnSpPr>
         <p:spPr>
           <a:xfrm>
-            <a:off x="7303452" y="3761994"/>
+            <a:off x="7303452" y="3901694"/>
             <a:ext cx="330200" cy="0"/>
           </a:xfrm>
           <a:prstGeom prst="line">
@@ -16293,7 +16298,7 @@
         </p:nvSpPr>
         <p:spPr>
           <a:xfrm>
-            <a:off x="7633652" y="3622294"/>
+            <a:off x="7633652" y="3761994"/>
             <a:ext cx="1906179" cy="279400"/>
           </a:xfrm>
           <a:prstGeom prst="roundRect">
@@ -16327,7 +16332,7 @@
         </p:nvSpPr>
         <p:spPr>
           <a:xfrm>
-            <a:off x="7633652" y="3622294"/>
+            <a:off x="7633652" y="3761994"/>
             <a:ext cx="1906179" cy="279400"/>
           </a:xfrm>
           <a:prstGeom prst="rect">
@@ -16411,7 +16416,7 @@
                 <a:ea typeface="맑은 고딕"/>
                 <a:cs typeface="맑은 고딕"/>
               </a:rPr>
-              <a:t>TargetSimCore/include/TargetSim.h  54 ~ 72행</a:t>
+              <a:t>TargetSimCore/include/TargetSim.h  58 ~ 78행</a:t>
             </a:r>
             <a:endParaRPr lang="ko-KR" altLang="en-US" sz="1000" dirty="0"/>
           </a:p>
@@ -17908,7 +17913,7 @@
       </p:sp>
       <p:pic>
         <p:nvPicPr>
-          <p:cNvPr id="7" name="Code Capture" descr="TargetSim.h 74-103"/>
+          <p:cNvPr id="7" name="Code Capture" descr="TargetSim.h 80-109"/>
           <p:cNvPicPr>
             <a:picLocks noChangeAspect="1"/>
           </p:cNvPicPr>
@@ -18542,7 +18547,7 @@
                 <a:ea typeface="맑은 고딕"/>
                 <a:cs typeface="맑은 고딕"/>
               </a:rPr>
-              <a:t>TargetSimCore/include/TargetSim.h  74 ~ 103행</a:t>
+              <a:t>TargetSimCore/include/TargetSim.h  80 ~ 109행</a:t>
             </a:r>
             <a:endParaRPr lang="ko-KR" altLang="en-US" sz="1000" dirty="0"/>
           </a:p>
@@ -18775,7 +18780,7 @@
       </p:sp>
       <p:pic>
         <p:nvPicPr>
-          <p:cNvPr id="7" name="Code Capture" descr="TargetSim.c 156-181"/>
+          <p:cNvPr id="7" name="Code Capture" descr="TargetSim.c 207-234"/>
           <p:cNvPicPr>
             <a:picLocks noChangeAspect="1"/>
           </p:cNvPicPr>
@@ -18790,7 +18795,7 @@
         <p:spPr>
           <a:xfrm>
             <a:off x="640080" y="1792224"/>
-            <a:ext cx="6714172" cy="4079240"/>
+            <a:ext cx="6714172" cy="4358640"/>
           </a:xfrm>
           <a:prstGeom prst="rect">
             <a:avLst/>
@@ -18919,11 +18924,11 @@
         <p:spPr>
           <a:xfrm>
             <a:off x="968692" y="4080764"/>
-            <a:ext cx="6334760" cy="1567180"/>
+            <a:ext cx="6334760" cy="1846580"/>
           </a:xfrm>
           <a:prstGeom prst="roundRect">
             <a:avLst>
-              <a:gd name="adj" fmla="val 2431"/>
+              <a:gd name="adj" fmla="val 2063"/>
             </a:avLst>
           </a:prstGeom>
           <a:solidFill>
@@ -19269,7 +19274,7 @@
         </p:nvCxnSpPr>
         <p:spPr>
           <a:xfrm>
-            <a:off x="7303452" y="4864354"/>
+            <a:off x="7303452" y="5004054"/>
             <a:ext cx="330200" cy="0"/>
           </a:xfrm>
           <a:prstGeom prst="line">
@@ -19291,7 +19296,7 @@
         </p:nvSpPr>
         <p:spPr>
           <a:xfrm>
-            <a:off x="7633652" y="4724654"/>
+            <a:off x="7633652" y="4864354"/>
             <a:ext cx="1435781" cy="279400"/>
           </a:xfrm>
           <a:prstGeom prst="roundRect">
@@ -19325,7 +19330,7 @@
         </p:nvSpPr>
         <p:spPr>
           <a:xfrm>
-            <a:off x="7633652" y="4724654"/>
+            <a:off x="7633652" y="4864354"/>
             <a:ext cx="1435781" cy="279400"/>
           </a:xfrm>
           <a:prstGeom prst="rect">
@@ -19409,7 +19414,7 @@
                 <a:ea typeface="맑은 고딕"/>
                 <a:cs typeface="맑은 고딕"/>
               </a:rPr>
-              <a:t>TargetSimCore/src/TargetSim.c  156 ~ 181행</a:t>
+              <a:t>TargetSimCore/src/TargetSim.c  207 ~ 234행</a:t>
             </a:r>
             <a:endParaRPr lang="ko-KR" altLang="en-US" sz="1000" dirty="0"/>
           </a:p>
@@ -19642,7 +19647,7 @@
       </p:sp>
       <p:pic>
         <p:nvPicPr>
-          <p:cNvPr id="7" name="Code Capture" descr="TargetSim.c 183-213"/>
+          <p:cNvPr id="7" name="Code Capture" descr="TargetSim.c 236-270"/>
           <p:cNvPicPr>
             <a:picLocks noChangeAspect="1"/>
           </p:cNvPicPr>
@@ -19657,7 +19662,7 @@
         <p:spPr>
           <a:xfrm>
             <a:off x="640080" y="1792224"/>
-            <a:ext cx="6714172" cy="4342892"/>
+            <a:ext cx="6714172" cy="4346448"/>
           </a:xfrm>
           <a:prstGeom prst="rect">
             <a:avLst/>
@@ -19677,12 +19682,12 @@
         </p:nvSpPr>
         <p:spPr>
           <a:xfrm>
-            <a:off x="968692" y="3409950"/>
-            <a:ext cx="6334760" cy="453390"/>
+            <a:off x="968692" y="3467608"/>
+            <a:ext cx="6334760" cy="411480"/>
           </a:xfrm>
           <a:prstGeom prst="roundRect">
             <a:avLst>
-              <a:gd name="adj" fmla="val 8403"/>
+              <a:gd name="adj" fmla="val 9259"/>
             </a:avLst>
           </a:prstGeom>
           <a:solidFill>
@@ -19713,12 +19718,12 @@
         </p:nvSpPr>
         <p:spPr>
           <a:xfrm>
-            <a:off x="968692" y="3933190"/>
-            <a:ext cx="6334760" cy="453390"/>
+            <a:off x="968692" y="3934968"/>
+            <a:ext cx="6334760" cy="528320"/>
           </a:xfrm>
           <a:prstGeom prst="roundRect">
             <a:avLst>
-              <a:gd name="adj" fmla="val 8403"/>
+              <a:gd name="adj" fmla="val 7212"/>
             </a:avLst>
           </a:prstGeom>
           <a:solidFill>
@@ -19749,12 +19754,12 @@
         </p:nvSpPr>
         <p:spPr>
           <a:xfrm>
-            <a:off x="968692" y="4456430"/>
-            <a:ext cx="6334760" cy="1107440"/>
+            <a:off x="968692" y="4519168"/>
+            <a:ext cx="6334760" cy="1112520"/>
           </a:xfrm>
           <a:prstGeom prst="roundRect">
             <a:avLst>
-              <a:gd name="adj" fmla="val 3440"/>
+              <a:gd name="adj" fmla="val 3425"/>
             </a:avLst>
           </a:prstGeom>
           <a:solidFill>
@@ -19785,12 +19790,12 @@
         </p:nvSpPr>
         <p:spPr>
           <a:xfrm>
-            <a:off x="968692" y="5633720"/>
-            <a:ext cx="6334760" cy="292100"/>
+            <a:off x="968692" y="5687568"/>
+            <a:ext cx="6334760" cy="264160"/>
           </a:xfrm>
           <a:prstGeom prst="roundRect">
             <a:avLst>
-              <a:gd name="adj" fmla="val 13043"/>
+              <a:gd name="adj" fmla="val 14423"/>
             </a:avLst>
           </a:prstGeom>
           <a:solidFill>
@@ -19821,7 +19826,7 @@
         </p:nvCxnSpPr>
         <p:spPr>
           <a:xfrm>
-            <a:off x="7303452" y="3636645"/>
+            <a:off x="7303452" y="3673348"/>
             <a:ext cx="330200" cy="0"/>
           </a:xfrm>
           <a:prstGeom prst="line">
@@ -19843,7 +19848,7 @@
         </p:nvSpPr>
         <p:spPr>
           <a:xfrm>
-            <a:off x="7633652" y="3496945"/>
+            <a:off x="7633652" y="3533648"/>
             <a:ext cx="1900479" cy="279400"/>
           </a:xfrm>
           <a:prstGeom prst="roundRect">
@@ -19877,7 +19882,7 @@
         </p:nvSpPr>
         <p:spPr>
           <a:xfrm>
-            <a:off x="7633652" y="3496945"/>
+            <a:off x="7633652" y="3533648"/>
             <a:ext cx="1900479" cy="279400"/>
           </a:xfrm>
           <a:prstGeom prst="rect">
@@ -19926,7 +19931,7 @@
         </p:nvCxnSpPr>
         <p:spPr>
           <a:xfrm>
-            <a:off x="7303452" y="4159885"/>
+            <a:off x="7303452" y="4199128"/>
             <a:ext cx="330200" cy="0"/>
           </a:xfrm>
           <a:prstGeom prst="line">
@@ -19948,7 +19953,7 @@
         </p:nvSpPr>
         <p:spPr>
           <a:xfrm>
-            <a:off x="7633652" y="4020185"/>
+            <a:off x="7633652" y="4059428"/>
             <a:ext cx="1641643" cy="279400"/>
           </a:xfrm>
           <a:prstGeom prst="roundRect">
@@ -19982,7 +19987,7 @@
         </p:nvSpPr>
         <p:spPr>
           <a:xfrm>
-            <a:off x="7633652" y="4020185"/>
+            <a:off x="7633652" y="4059428"/>
             <a:ext cx="1641643" cy="279400"/>
           </a:xfrm>
           <a:prstGeom prst="rect">
@@ -20031,7 +20036,7 @@
         </p:nvCxnSpPr>
         <p:spPr>
           <a:xfrm>
-            <a:off x="7303452" y="5010150"/>
+            <a:off x="7303452" y="5075428"/>
             <a:ext cx="330200" cy="0"/>
           </a:xfrm>
           <a:prstGeom prst="line">
@@ -20053,7 +20058,7 @@
         </p:nvSpPr>
         <p:spPr>
           <a:xfrm>
-            <a:off x="7633652" y="4870450"/>
+            <a:off x="7633652" y="4935728"/>
             <a:ext cx="1809283" cy="279400"/>
           </a:xfrm>
           <a:prstGeom prst="roundRect">
@@ -20087,7 +20092,7 @@
         </p:nvSpPr>
         <p:spPr>
           <a:xfrm>
-            <a:off x="7633652" y="4870450"/>
+            <a:off x="7633652" y="4935728"/>
             <a:ext cx="1809283" cy="279400"/>
           </a:xfrm>
           <a:prstGeom prst="rect">
@@ -20136,7 +20141,7 @@
         </p:nvCxnSpPr>
         <p:spPr>
           <a:xfrm>
-            <a:off x="7303452" y="5779770"/>
+            <a:off x="7303452" y="5819648"/>
             <a:ext cx="330200" cy="0"/>
           </a:xfrm>
           <a:prstGeom prst="line">
@@ -20158,7 +20163,7 @@
         </p:nvSpPr>
         <p:spPr>
           <a:xfrm>
-            <a:off x="7633652" y="5640070"/>
+            <a:off x="7633652" y="5679948"/>
             <a:ext cx="1344249" cy="279400"/>
           </a:xfrm>
           <a:prstGeom prst="roundRect">
@@ -20192,7 +20197,7 @@
         </p:nvSpPr>
         <p:spPr>
           <a:xfrm>
-            <a:off x="7633652" y="5640070"/>
+            <a:off x="7633652" y="5679948"/>
             <a:ext cx="1344249" cy="279400"/>
           </a:xfrm>
           <a:prstGeom prst="rect">
@@ -20276,7 +20281,7 @@
                 <a:ea typeface="맑은 고딕"/>
                 <a:cs typeface="맑은 고딕"/>
               </a:rPr>
-              <a:t>TargetSimCore/src/TargetSim.c  183 ~ 213행</a:t>
+              <a:t>TargetSimCore/src/TargetSim.c  236 ~ 270행</a:t>
             </a:r>
             <a:endParaRPr lang="ko-KR" altLang="en-US" sz="1000" dirty="0"/>
           </a:p>
@@ -21417,7 +21422,7 @@
       </p:sp>
       <p:pic>
         <p:nvPicPr>
-          <p:cNvPr id="7" name="Code Capture" descr="TargetSim.c 11-28"/>
+          <p:cNvPr id="7" name="Code Capture" descr="TargetSim.c 3-20"/>
           <p:cNvPicPr>
             <a:picLocks noChangeAspect="1"/>
           </p:cNvPicPr>
@@ -21769,7 +21774,7 @@
                 <a:ea typeface="맑은 고딕"/>
                 <a:cs typeface="맑은 고딕"/>
               </a:rPr>
-              <a:t>TargetSimCore/src/TargetSim.c  11 ~ 28행</a:t>
+              <a:t>TargetSimCore/src/TargetSim.c  3 ~ 20행</a:t>
             </a:r>
             <a:endParaRPr lang="ko-KR" altLang="en-US" sz="1000" dirty="0"/>
           </a:p>
@@ -22002,7 +22007,7 @@
       </p:sp>
       <p:pic>
         <p:nvPicPr>
-          <p:cNvPr id="7" name="Code Capture" descr="TargetSim.c 30-57"/>
+          <p:cNvPr id="7" name="Code Capture" descr="TargetSim.c 22-49"/>
           <p:cNvPicPr>
             <a:picLocks noChangeAspect="1"/>
           </p:cNvPicPr>
@@ -22354,7 +22359,7 @@
                 <a:ea typeface="맑은 고딕"/>
                 <a:cs typeface="맑은 고딕"/>
               </a:rPr>
-              <a:t>TargetSimCore/src/TargetSim.c  30 ~ 57행</a:t>
+              <a:t>TargetSimCore/src/TargetSim.c  22 ~ 49행</a:t>
             </a:r>
             <a:endParaRPr lang="ko-KR" altLang="en-US" sz="1000" dirty="0"/>
           </a:p>
@@ -22593,8 +22598,8 @@
         </p:nvSpPr>
         <p:spPr>
           <a:xfrm>
-            <a:off x="640080" y="5655056"/>
-            <a:ext cx="10908792" cy="508000"/>
+            <a:off x="640080" y="5756656"/>
+            <a:ext cx="10908792" cy="406400"/>
           </a:xfrm>
           <a:prstGeom prst="rect">
             <a:avLst/>
@@ -22625,8 +22630,8 @@
         </p:nvSpPr>
         <p:spPr>
           <a:xfrm>
-            <a:off x="817880" y="5655056"/>
-            <a:ext cx="10553192" cy="508000"/>
+            <a:off x="817880" y="5756656"/>
+            <a:ext cx="10553192" cy="406400"/>
           </a:xfrm>
           <a:prstGeom prst="rect">
             <a:avLst/>
@@ -22811,7 +22816,7 @@
       </p:sp>
       <p:pic>
         <p:nvPicPr>
-          <p:cNvPr id="7" name="Code Capture" descr="TargetSim.c 131-154"/>
+          <p:cNvPr id="7" name="Code Capture" descr="TargetSim.c 178-205"/>
           <p:cNvPicPr>
             <a:picLocks noChangeAspect="1"/>
           </p:cNvPicPr>
@@ -22826,7 +22831,7 @@
         <p:spPr>
           <a:xfrm>
             <a:off x="640080" y="1792224"/>
-            <a:ext cx="6714172" cy="3661664"/>
+            <a:ext cx="6714172" cy="3843528"/>
           </a:xfrm>
           <a:prstGeom prst="rect">
             <a:avLst/>
@@ -22846,12 +22851,12 @@
         </p:nvSpPr>
         <p:spPr>
           <a:xfrm>
-            <a:off x="968692" y="1842516"/>
-            <a:ext cx="6334760" cy="464820"/>
+            <a:off x="968692" y="1835658"/>
+            <a:ext cx="6334760" cy="430530"/>
           </a:xfrm>
           <a:prstGeom prst="roundRect">
             <a:avLst>
-              <a:gd name="adj" fmla="val 8197"/>
+              <a:gd name="adj" fmla="val 8850"/>
             </a:avLst>
           </a:prstGeom>
           <a:solidFill>
@@ -22882,12 +22887,12 @@
         </p:nvSpPr>
         <p:spPr>
           <a:xfrm>
-            <a:off x="968692" y="2380996"/>
-            <a:ext cx="6334760" cy="599440"/>
+            <a:off x="968692" y="2328418"/>
+            <a:ext cx="6334760" cy="553720"/>
           </a:xfrm>
           <a:prstGeom prst="roundRect">
             <a:avLst>
-              <a:gd name="adj" fmla="val 6356"/>
+              <a:gd name="adj" fmla="val 6881"/>
             </a:avLst>
           </a:prstGeom>
           <a:solidFill>
@@ -22918,12 +22923,12 @@
         </p:nvSpPr>
         <p:spPr>
           <a:xfrm>
-            <a:off x="968692" y="4131056"/>
-            <a:ext cx="6334760" cy="868680"/>
+            <a:off x="968692" y="3929888"/>
+            <a:ext cx="6334760" cy="800100"/>
           </a:xfrm>
           <a:prstGeom prst="roundRect">
             <a:avLst>
-              <a:gd name="adj" fmla="val 4386"/>
+              <a:gd name="adj" fmla="val 4762"/>
             </a:avLst>
           </a:prstGeom>
           <a:solidFill>
@@ -22954,12 +22959,12 @@
         </p:nvSpPr>
         <p:spPr>
           <a:xfrm>
-            <a:off x="968692" y="5073396"/>
-            <a:ext cx="6334760" cy="165100"/>
+            <a:off x="968692" y="5284978"/>
+            <a:ext cx="6334760" cy="153670"/>
           </a:xfrm>
           <a:prstGeom prst="roundRect">
             <a:avLst>
-              <a:gd name="adj" fmla="val 23077"/>
+              <a:gd name="adj" fmla="val 24793"/>
             </a:avLst>
           </a:prstGeom>
           <a:solidFill>
@@ -22990,7 +22995,7 @@
         </p:nvCxnSpPr>
         <p:spPr>
           <a:xfrm>
-            <a:off x="7303452" y="2074926"/>
+            <a:off x="7303452" y="2050923"/>
             <a:ext cx="330200" cy="0"/>
           </a:xfrm>
           <a:prstGeom prst="line">
@@ -23012,7 +23017,7 @@
         </p:nvSpPr>
         <p:spPr>
           <a:xfrm>
-            <a:off x="7633652" y="1935226"/>
+            <a:off x="7633652" y="1911223"/>
             <a:ext cx="1403259" cy="279400"/>
           </a:xfrm>
           <a:prstGeom prst="roundRect">
@@ -23046,7 +23051,7 @@
         </p:nvSpPr>
         <p:spPr>
           <a:xfrm>
-            <a:off x="7633652" y="1935226"/>
+            <a:off x="7633652" y="1911223"/>
             <a:ext cx="1403259" cy="279400"/>
           </a:xfrm>
           <a:prstGeom prst="rect">
@@ -23095,7 +23100,7 @@
         </p:nvCxnSpPr>
         <p:spPr>
           <a:xfrm>
-            <a:off x="7303452" y="2680716"/>
+            <a:off x="7303452" y="2605278"/>
             <a:ext cx="330200" cy="0"/>
           </a:xfrm>
           <a:prstGeom prst="line">
@@ -23117,7 +23122,7 @@
         </p:nvSpPr>
         <p:spPr>
           <a:xfrm>
-            <a:off x="7633652" y="2541016"/>
+            <a:off x="7633652" y="2465578"/>
             <a:ext cx="1079713" cy="279400"/>
           </a:xfrm>
           <a:prstGeom prst="roundRect">
@@ -23151,7 +23156,7 @@
         </p:nvSpPr>
         <p:spPr>
           <a:xfrm>
-            <a:off x="7633652" y="2541016"/>
+            <a:off x="7633652" y="2465578"/>
             <a:ext cx="1079713" cy="279400"/>
           </a:xfrm>
           <a:prstGeom prst="rect">
@@ -23200,7 +23205,7 @@
         </p:nvCxnSpPr>
         <p:spPr>
           <a:xfrm>
-            <a:off x="7303452" y="4565396"/>
+            <a:off x="7303452" y="4329938"/>
             <a:ext cx="330200" cy="0"/>
           </a:xfrm>
           <a:prstGeom prst="line">
@@ -23222,7 +23227,7 @@
         </p:nvSpPr>
         <p:spPr>
           <a:xfrm>
-            <a:off x="7633652" y="4425696"/>
+            <a:off x="7633652" y="4190238"/>
             <a:ext cx="1570899" cy="279400"/>
           </a:xfrm>
           <a:prstGeom prst="roundRect">
@@ -23256,7 +23261,7 @@
         </p:nvSpPr>
         <p:spPr>
           <a:xfrm>
-            <a:off x="7633652" y="4425696"/>
+            <a:off x="7633652" y="4190238"/>
             <a:ext cx="1570899" cy="279400"/>
           </a:xfrm>
           <a:prstGeom prst="rect">
@@ -23305,7 +23310,7 @@
         </p:nvCxnSpPr>
         <p:spPr>
           <a:xfrm>
-            <a:off x="7303452" y="5155946"/>
+            <a:off x="7303452" y="5361813"/>
             <a:ext cx="330200" cy="0"/>
           </a:xfrm>
           <a:prstGeom prst="line">
@@ -23327,7 +23332,7 @@
         </p:nvSpPr>
         <p:spPr>
           <a:xfrm>
-            <a:off x="7633652" y="5016246"/>
+            <a:off x="7633652" y="5222113"/>
             <a:ext cx="1511889" cy="279400"/>
           </a:xfrm>
           <a:prstGeom prst="roundRect">
@@ -23361,7 +23366,7 @@
         </p:nvSpPr>
         <p:spPr>
           <a:xfrm>
-            <a:off x="7633652" y="5016246"/>
+            <a:off x="7633652" y="5222113"/>
             <a:ext cx="1511889" cy="279400"/>
           </a:xfrm>
           <a:prstGeom prst="rect">
@@ -23445,7 +23450,7 @@
                 <a:ea typeface="맑은 고딕"/>
                 <a:cs typeface="맑은 고딕"/>
               </a:rPr>
-              <a:t>TargetSimCore/src/TargetSim.c  131 ~ 154행</a:t>
+              <a:t>TargetSimCore/src/TargetSim.c  178 ~ 205행</a:t>
             </a:r>
             <a:endParaRPr lang="ko-KR" altLang="en-US" sz="1000" dirty="0"/>
           </a:p>
@@ -23811,7 +23816,7 @@
         <p:spPr>
           <a:xfrm>
             <a:off x="640080" y="2148840"/>
-            <a:ext cx="2203196" cy="732790"/>
+            <a:ext cx="2203196" cy="1052830"/>
           </a:xfrm>
           <a:prstGeom prst="roundRect">
             <a:avLst>
@@ -23845,7 +23850,7 @@
         <p:spPr>
           <a:xfrm>
             <a:off x="767080" y="2237740"/>
-            <a:ext cx="1949196" cy="542290"/>
+            <a:ext cx="1949196" cy="862330"/>
           </a:xfrm>
           <a:prstGeom prst="rect">
             <a:avLst/>
@@ -23879,7 +23884,7 @@
                 <a:ea typeface="맑은 고딕"/>
                 <a:cs typeface="맑은 고딕"/>
               </a:rPr>
-              <a:t>① 시나리오 선택</a:t>
+              <a:t>① 시나리오 · 계산 로그</a:t>
             </a:r>
             <a:endParaRPr lang="ko-KR" altLang="en-US" sz="1050" dirty="0"/>
           </a:p>
@@ -23943,6 +23948,80 @@
                 <a:cs typeface="맑은 고딕"/>
               </a:rPr>
               <a:t>f_LoadPreset</a:t>
+            </a:r>
+            <a:r>
+              <a:rPr lang="ko-KR" altLang="en-US" sz="900" b="0" i="0" dirty="0">
+                <a:solidFill>
+                  <a:srgbClr val="3F4B63"/>
+                </a:solidFill>
+                <a:latin typeface="맑은 고딕"/>
+                <a:ea typeface="맑은 고딕"/>
+                <a:cs typeface="맑은 고딕"/>
+              </a:rPr>
+              <a:t>).</a:t>
+            </a:r>
+            <a:endParaRPr lang="ko-KR" altLang="en-US" sz="900" dirty="0"/>
+          </a:p>
+          <a:p>
+            <a:pPr algn="l">
+              <a:lnSpc>
+                <a:spcPts val="1260"/>
+              </a:lnSpc>
+              <a:spcBef>
+                <a:spcPts val="0"/>
+              </a:spcBef>
+              <a:spcAft>
+                <a:spcPts val="0"/>
+              </a:spcAft>
+              <a:buNone/>
+            </a:pPr>
+            <a:r>
+              <a:rPr lang="ko-KR" altLang="en-US" sz="900" b="0" i="0" dirty="0">
+                <a:solidFill>
+                  <a:srgbClr val="3F4B63"/>
+                </a:solidFill>
+                <a:latin typeface="맑은 고딕"/>
+                <a:ea typeface="맑은 고딕"/>
+                <a:cs typeface="맑은 고딕"/>
+              </a:rPr>
+              <a:t>계산 로그를 켜면 계산 과정을</a:t>
+            </a:r>
+            <a:endParaRPr lang="ko-KR" altLang="en-US" sz="900" dirty="0"/>
+          </a:p>
+          <a:p>
+            <a:pPr algn="l">
+              <a:lnSpc>
+                <a:spcPts val="1260"/>
+              </a:lnSpc>
+              <a:spcBef>
+                <a:spcPts val="0"/>
+              </a:spcBef>
+              <a:spcAft>
+                <a:spcPts val="0"/>
+              </a:spcAft>
+              <a:buNone/>
+            </a:pPr>
+            <a:r>
+              <a:rPr lang="ko-KR" altLang="en-US" sz="900" b="0" i="0" dirty="0">
+                <a:solidFill>
+                  <a:srgbClr val="3F4B63"/>
+                </a:solidFill>
+                <a:latin typeface="맑은 고딕"/>
+                <a:ea typeface="맑은 고딕"/>
+                <a:cs typeface="맑은 고딕"/>
+              </a:rPr>
+              <a:t>콘솔 창에 적는다 (</a:t>
+            </a:r>
+            <a:r>
+              <a:rPr lang="ko-KR" altLang="en-US" sz="850" b="1" i="0" dirty="0">
+                <a:solidFill>
+                  <a:srgbClr val="1B2740"/>
+                </a:solidFill>
+                <a:latin typeface="Consolas"/>
+                <a:ea typeface="맑은 고딕"/>
+                <a:cs typeface="맑은 고딕"/>
+              </a:rPr>
+              <a:t>CCalcLog</a:t>
             </a:r>
             <a:r>
               <a:rPr lang="ko-KR" altLang="en-US" sz="900" b="0" i="0" dirty="0">
@@ -24080,7 +24159,7 @@
         </p:nvSpPr>
         <p:spPr>
           <a:xfrm>
-            <a:off x="640080" y="2983230"/>
+            <a:off x="640080" y="3303270"/>
             <a:ext cx="2203196" cy="732790"/>
           </a:xfrm>
           <a:prstGeom prst="roundRect">
@@ -24114,7 +24193,7 @@
         </p:nvSpPr>
         <p:spPr>
           <a:xfrm>
-            <a:off x="767080" y="3072130"/>
+            <a:off x="767080" y="3392170"/>
             <a:ext cx="1949196" cy="542290"/>
           </a:xfrm>
           <a:prstGeom prst="rect">
@@ -24238,7 +24317,7 @@
         <p:spPr>
           <a:xfrm flipH="1">
             <a:off x="2843276" y="2771829"/>
-            <a:ext cx="146050" cy="363801"/>
+            <a:ext cx="146050" cy="683841"/>
           </a:xfrm>
           <a:prstGeom prst="bentConnector3">
             <a:avLst>
@@ -24350,7 +24429,7 @@
         </p:nvSpPr>
         <p:spPr>
           <a:xfrm>
-            <a:off x="640080" y="4049612"/>
+            <a:off x="640080" y="4137660"/>
             <a:ext cx="2203196" cy="732790"/>
           </a:xfrm>
           <a:prstGeom prst="roundRect">
@@ -24384,7 +24463,7 @@
         </p:nvSpPr>
         <p:spPr>
           <a:xfrm>
-            <a:off x="767080" y="4138512"/>
+            <a:off x="767080" y="4226560"/>
             <a:ext cx="1949196" cy="542290"/>
           </a:xfrm>
           <a:prstGeom prst="rect">
@@ -32643,7 +32722,7 @@
                 <a:ea typeface="맑은 고딕"/>
                 <a:cs typeface="맑은 고딕"/>
               </a:rPr>
-              <a:t>CTrajectoryPlot, CGridCtrl</a:t>
+              <a:t>CTrajectoryPlot, CGridCtrl, CCalcLog</a:t>
             </a:r>
             <a:endParaRPr lang="ko-KR" altLang="en-US" sz="950" dirty="0"/>
           </a:p>
@@ -32692,7 +32771,7 @@
                 <a:ea typeface="맑은 고딕"/>
                 <a:cs typeface="맑은 고딕"/>
               </a:rPr>
-              <a:t>궤적 · 고도 · 속력 그림, 표 편집</a:t>
+              <a:t>궤적 · 고도 · 속력 그림, 표 편집, 계산 로그</a:t>
             </a:r>
             <a:endParaRPr lang="ko-KR" altLang="en-US" sz="1000" dirty="0"/>
           </a:p>
@@ -33834,7 +33913,7 @@
                 <a:ea typeface="맑은 고딕"/>
                 <a:cs typeface="맑은 고딕"/>
               </a:rPr>
-              <a:t>이 두 구조체와 함수로만 주고받는다.</a:t>
+              <a:t>헤더의 구조체와 함수로만 주고받는다.</a:t>
             </a:r>
             <a:endParaRPr lang="ko-KR" altLang="en-US" sz="950" dirty="0"/>
           </a:p>
@@ -39789,7 +39868,7 @@
       </p:sp>
       <p:pic>
         <p:nvPicPr>
-          <p:cNvPr id="7" name="Code Capture" descr="TargetSim.h 25-52"/>
+          <p:cNvPr id="7" name="Code Capture" descr="TargetSim.h 29-56"/>
           <p:cNvPicPr>
             <a:picLocks noChangeAspect="1"/>
           </p:cNvPicPr>
@@ -40282,7 +40361,7 @@
                 <a:ea typeface="맑은 고딕"/>
                 <a:cs typeface="맑은 고딕"/>
               </a:rPr>
-              <a:t>TargetSimCore/include/TargetSim.h  25 ~ 52행</a:t>
+              <a:t>TargetSimCore/include/TargetSim.h  29 ~ 56행</a:t>
             </a:r>
             <a:endParaRPr lang="ko-KR" altLang="en-US" sz="1000" dirty="0"/>
           </a:p>
